--- a/Dynamic_Industry_One_Page_Dashboard_EN.pptx
+++ b/Dynamic_Industry_One_Page_Dashboard_EN.pptx
@@ -895,15 +895,39 @@
           <a:ln/>
         </p:spPr>
       </p:sp>
-      <p:sp>
-        <p:nvSpPr>
-          <p:cNvPr id="3" name="Text 1"/>
-          <p:cNvSpPr/>
-          <p:nvPr/>
-        </p:nvSpPr>
-        <p:spPr>
-          <a:xfrm>
-            <a:off x="411480" y="128016"/>
+      <p:pic>
+        <p:nvPicPr>
+          <p:cNvPr id="3" name="Image 0" descr="preencoded.png">    </p:cNvPr>
+          <p:cNvPicPr>
+            <a:picLocks noChangeAspect="1"/>
+          </p:cNvPicPr>
+          <p:nvPr/>
+        </p:nvPicPr>
+        <p:blipFill>
+          <a:blip r:embed="rId1"/>
+          <a:stretch>
+            <a:fillRect/>
+          </a:stretch>
+        </p:blipFill>
+        <p:spPr>
+          <a:xfrm>
+            <a:off x="411480" y="182880"/>
+            <a:ext cx="612648" cy="548640"/>
+          </a:xfrm>
+          <a:prstGeom prst="rect">
+            <a:avLst/>
+          </a:prstGeom>
+        </p:spPr>
+      </p:pic>
+      <p:sp>
+        <p:nvSpPr>
+          <p:cNvPr id="4" name="Text 1"/>
+          <p:cNvSpPr/>
+          <p:nvPr/>
+        </p:nvSpPr>
+        <p:spPr>
+          <a:xfrm>
+            <a:off x="1188720" y="128016"/>
             <a:ext cx="3657600" cy="274320"/>
           </a:xfrm>
           <a:prstGeom prst="rect">
@@ -936,14 +960,14 @@
       </p:sp>
       <p:sp>
         <p:nvSpPr>
-          <p:cNvPr id="4" name="Text 2"/>
-          <p:cNvSpPr/>
-          <p:nvPr/>
-        </p:nvSpPr>
-        <p:spPr>
-          <a:xfrm>
-            <a:off x="411480" y="384048"/>
-            <a:ext cx="7772400" cy="457200"/>
+          <p:cNvPr id="5" name="Text 2"/>
+          <p:cNvSpPr/>
+          <p:nvPr/>
+        </p:nvSpPr>
+        <p:spPr>
+          <a:xfrm>
+            <a:off x="1188720" y="384048"/>
+            <a:ext cx="7040880" cy="457200"/>
           </a:xfrm>
           <a:prstGeom prst="rect">
             <a:avLst/>
@@ -989,7 +1013,7 @@
       </p:sp>
       <p:sp>
         <p:nvSpPr>
-          <p:cNvPr id="5" name="Text 3"/>
+          <p:cNvPr id="6" name="Text 3"/>
           <p:cNvSpPr/>
           <p:nvPr/>
         </p:nvSpPr>
@@ -1028,7 +1052,7 @@
       </p:sp>
       <p:sp>
         <p:nvSpPr>
-          <p:cNvPr id="6" name="Text 4"/>
+          <p:cNvPr id="7" name="Text 4"/>
           <p:cNvSpPr/>
           <p:nvPr/>
         </p:nvSpPr>
@@ -1067,7 +1091,7 @@
       </p:sp>
       <p:sp>
         <p:nvSpPr>
-          <p:cNvPr id="7" name="Shape 5"/>
+          <p:cNvPr id="8" name="Shape 5"/>
           <p:cNvSpPr/>
           <p:nvPr/>
         </p:nvSpPr>
@@ -1101,7 +1125,7 @@
       </p:sp>
       <p:sp>
         <p:nvSpPr>
-          <p:cNvPr id="8" name="Text 6"/>
+          <p:cNvPr id="9" name="Text 6"/>
           <p:cNvSpPr/>
           <p:nvPr/>
         </p:nvSpPr>
@@ -1140,7 +1164,7 @@
       </p:sp>
       <p:sp>
         <p:nvSpPr>
-          <p:cNvPr id="9" name="Text 7"/>
+          <p:cNvPr id="10" name="Text 7"/>
           <p:cNvSpPr/>
           <p:nvPr/>
         </p:nvSpPr>
@@ -1179,7 +1203,7 @@
       </p:sp>
       <p:sp>
         <p:nvSpPr>
-          <p:cNvPr id="10" name="Shape 8"/>
+          <p:cNvPr id="11" name="Shape 8"/>
           <p:cNvSpPr/>
           <p:nvPr/>
         </p:nvSpPr>
@@ -1213,7 +1237,7 @@
       </p:sp>
       <p:sp>
         <p:nvSpPr>
-          <p:cNvPr id="11" name="Text 9"/>
+          <p:cNvPr id="12" name="Text 9"/>
           <p:cNvSpPr/>
           <p:nvPr/>
         </p:nvSpPr>
@@ -1252,7 +1276,7 @@
       </p:sp>
       <p:sp>
         <p:nvSpPr>
-          <p:cNvPr id="12" name="Text 10"/>
+          <p:cNvPr id="13" name="Text 10"/>
           <p:cNvSpPr/>
           <p:nvPr/>
         </p:nvSpPr>
@@ -1291,7 +1315,7 @@
       </p:sp>
       <p:sp>
         <p:nvSpPr>
-          <p:cNvPr id="13" name="Shape 11"/>
+          <p:cNvPr id="14" name="Shape 11"/>
           <p:cNvSpPr/>
           <p:nvPr/>
         </p:nvSpPr>
@@ -1325,7 +1349,7 @@
       </p:sp>
       <p:sp>
         <p:nvSpPr>
-          <p:cNvPr id="14" name="Text 12"/>
+          <p:cNvPr id="15" name="Text 12"/>
           <p:cNvSpPr/>
           <p:nvPr/>
         </p:nvSpPr>
@@ -1364,7 +1388,7 @@
       </p:sp>
       <p:sp>
         <p:nvSpPr>
-          <p:cNvPr id="15" name="Text 13"/>
+          <p:cNvPr id="16" name="Text 13"/>
           <p:cNvSpPr/>
           <p:nvPr/>
         </p:nvSpPr>
@@ -1403,7 +1427,7 @@
       </p:sp>
       <p:sp>
         <p:nvSpPr>
-          <p:cNvPr id="16" name="Shape 14"/>
+          <p:cNvPr id="17" name="Shape 14"/>
           <p:cNvSpPr/>
           <p:nvPr/>
         </p:nvSpPr>
@@ -1437,7 +1461,7 @@
       </p:sp>
       <p:sp>
         <p:nvSpPr>
-          <p:cNvPr id="17" name="Text 15"/>
+          <p:cNvPr id="18" name="Text 15"/>
           <p:cNvSpPr/>
           <p:nvPr/>
         </p:nvSpPr>
@@ -1476,7 +1500,7 @@
       </p:sp>
       <p:sp>
         <p:nvSpPr>
-          <p:cNvPr id="18" name="Text 16"/>
+          <p:cNvPr id="19" name="Text 16"/>
           <p:cNvSpPr/>
           <p:nvPr/>
         </p:nvSpPr>
@@ -1515,7 +1539,7 @@
       </p:sp>
       <p:sp>
         <p:nvSpPr>
-          <p:cNvPr id="19" name="Shape 17"/>
+          <p:cNvPr id="20" name="Shape 17"/>
           <p:cNvSpPr/>
           <p:nvPr/>
         </p:nvSpPr>
@@ -1549,7 +1573,7 @@
       </p:sp>
       <p:sp>
         <p:nvSpPr>
-          <p:cNvPr id="20" name="Text 18"/>
+          <p:cNvPr id="21" name="Text 18"/>
           <p:cNvSpPr/>
           <p:nvPr/>
         </p:nvSpPr>
@@ -1588,7 +1612,7 @@
       </p:sp>
       <p:sp>
         <p:nvSpPr>
-          <p:cNvPr id="21" name="Text 19"/>
+          <p:cNvPr id="22" name="Text 19"/>
           <p:cNvSpPr/>
           <p:nvPr/>
         </p:nvSpPr>
@@ -1627,7 +1651,7 @@
       </p:sp>
       <p:sp>
         <p:nvSpPr>
-          <p:cNvPr id="22" name="Shape 20"/>
+          <p:cNvPr id="23" name="Shape 20"/>
           <p:cNvSpPr/>
           <p:nvPr/>
         </p:nvSpPr>
@@ -1661,7 +1685,7 @@
       </p:sp>
       <p:sp>
         <p:nvSpPr>
-          <p:cNvPr id="23" name="Text 21"/>
+          <p:cNvPr id="24" name="Text 21"/>
           <p:cNvSpPr/>
           <p:nvPr/>
         </p:nvSpPr>
@@ -1700,7 +1724,7 @@
       </p:sp>
       <p:sp>
         <p:nvSpPr>
-          <p:cNvPr id="24" name="Text 22"/>
+          <p:cNvPr id="25" name="Text 22"/>
           <p:cNvSpPr/>
           <p:nvPr/>
         </p:nvSpPr>
@@ -1739,7 +1763,7 @@
       </p:sp>
       <p:sp>
         <p:nvSpPr>
-          <p:cNvPr id="25" name="Shape 23"/>
+          <p:cNvPr id="26" name="Shape 23"/>
           <p:cNvSpPr/>
           <p:nvPr/>
         </p:nvSpPr>
@@ -1766,7 +1790,7 @@
       </p:sp>
       <p:sp>
         <p:nvSpPr>
-          <p:cNvPr id="26" name="Text 24"/>
+          <p:cNvPr id="27" name="Text 24"/>
           <p:cNvSpPr/>
           <p:nvPr/>
         </p:nvSpPr>
@@ -1819,7 +1843,7 @@
       </p:sp>
       <p:sp>
         <p:nvSpPr>
-          <p:cNvPr id="27" name="Shape 25"/>
+          <p:cNvPr id="28" name="Shape 25"/>
           <p:cNvSpPr/>
           <p:nvPr/>
         </p:nvSpPr>
@@ -1839,7 +1863,7 @@
       </p:sp>
       <p:sp>
         <p:nvSpPr>
-          <p:cNvPr id="28" name="Text 26"/>
+          <p:cNvPr id="29" name="Text 26"/>
           <p:cNvSpPr/>
           <p:nvPr/>
         </p:nvSpPr>
@@ -1898,7 +1922,7 @@
       </p:sp>
       <p:sp>
         <p:nvSpPr>
-          <p:cNvPr id="29" name="Shape 27"/>
+          <p:cNvPr id="30" name="Shape 27"/>
           <p:cNvSpPr/>
           <p:nvPr/>
         </p:nvSpPr>
@@ -1918,7 +1942,7 @@
       </p:sp>
       <p:sp>
         <p:nvSpPr>
-          <p:cNvPr id="30" name="Text 28"/>
+          <p:cNvPr id="31" name="Text 28"/>
           <p:cNvSpPr/>
           <p:nvPr/>
         </p:nvSpPr>
@@ -1977,7 +2001,7 @@
       </p:sp>
       <p:sp>
         <p:nvSpPr>
-          <p:cNvPr id="31" name="Shape 29"/>
+          <p:cNvPr id="32" name="Shape 29"/>
           <p:cNvSpPr/>
           <p:nvPr/>
         </p:nvSpPr>
@@ -1997,7 +2021,7 @@
       </p:sp>
       <p:sp>
         <p:nvSpPr>
-          <p:cNvPr id="32" name="Text 30"/>
+          <p:cNvPr id="33" name="Text 30"/>
           <p:cNvSpPr/>
           <p:nvPr/>
         </p:nvSpPr>
@@ -2056,7 +2080,7 @@
       </p:sp>
       <p:sp>
         <p:nvSpPr>
-          <p:cNvPr id="33" name="Shape 31"/>
+          <p:cNvPr id="34" name="Shape 31"/>
           <p:cNvSpPr/>
           <p:nvPr/>
         </p:nvSpPr>
@@ -2078,7 +2102,7 @@
       </p:sp>
       <p:sp>
         <p:nvSpPr>
-          <p:cNvPr id="34" name="Text 32"/>
+          <p:cNvPr id="35" name="Text 32"/>
           <p:cNvSpPr/>
           <p:nvPr/>
         </p:nvSpPr>
@@ -2163,7 +2187,7 @@
       </p:sp>
       <p:sp>
         <p:nvSpPr>
-          <p:cNvPr id="35" name="Shape 33"/>
+          <p:cNvPr id="36" name="Shape 33"/>
           <p:cNvSpPr/>
           <p:nvPr/>
         </p:nvSpPr>
@@ -2190,7 +2214,7 @@
       </p:sp>
       <p:sp>
         <p:nvSpPr>
-          <p:cNvPr id="36" name="Text 34"/>
+          <p:cNvPr id="37" name="Text 34"/>
           <p:cNvSpPr/>
           <p:nvPr/>
         </p:nvSpPr>
@@ -2243,7 +2267,7 @@
       </p:sp>
       <p:sp>
         <p:nvSpPr>
-          <p:cNvPr id="37" name="Shape 35"/>
+          <p:cNvPr id="38" name="Shape 35"/>
           <p:cNvSpPr/>
           <p:nvPr/>
         </p:nvSpPr>
@@ -2266,7 +2290,7 @@
       </p:sp>
       <p:sp>
         <p:nvSpPr>
-          <p:cNvPr id="38" name="Shape 36"/>
+          <p:cNvPr id="39" name="Shape 36"/>
           <p:cNvSpPr/>
           <p:nvPr/>
         </p:nvSpPr>
@@ -2288,7 +2312,7 @@
       </p:sp>
       <p:sp>
         <p:nvSpPr>
-          <p:cNvPr id="39" name="Text 37"/>
+          <p:cNvPr id="40" name="Text 37"/>
           <p:cNvSpPr/>
           <p:nvPr/>
         </p:nvSpPr>
@@ -2327,7 +2351,7 @@
       </p:sp>
       <p:sp>
         <p:nvSpPr>
-          <p:cNvPr id="40" name="Text 38"/>
+          <p:cNvPr id="41" name="Text 38"/>
           <p:cNvSpPr/>
           <p:nvPr/>
         </p:nvSpPr>
@@ -2366,7 +2390,7 @@
       </p:sp>
       <p:sp>
         <p:nvSpPr>
-          <p:cNvPr id="41" name="Shape 39"/>
+          <p:cNvPr id="42" name="Shape 39"/>
           <p:cNvSpPr/>
           <p:nvPr/>
         </p:nvSpPr>
@@ -2388,7 +2412,7 @@
       </p:sp>
       <p:sp>
         <p:nvSpPr>
-          <p:cNvPr id="42" name="Text 40"/>
+          <p:cNvPr id="43" name="Text 40"/>
           <p:cNvSpPr/>
           <p:nvPr/>
         </p:nvSpPr>
@@ -2427,7 +2451,7 @@
       </p:sp>
       <p:sp>
         <p:nvSpPr>
-          <p:cNvPr id="43" name="Text 41"/>
+          <p:cNvPr id="44" name="Text 41"/>
           <p:cNvSpPr/>
           <p:nvPr/>
         </p:nvSpPr>
@@ -2466,7 +2490,7 @@
       </p:sp>
       <p:sp>
         <p:nvSpPr>
-          <p:cNvPr id="44" name="Shape 42"/>
+          <p:cNvPr id="45" name="Shape 42"/>
           <p:cNvSpPr/>
           <p:nvPr/>
         </p:nvSpPr>
@@ -2488,7 +2512,7 @@
       </p:sp>
       <p:sp>
         <p:nvSpPr>
-          <p:cNvPr id="45" name="Text 43"/>
+          <p:cNvPr id="46" name="Text 43"/>
           <p:cNvSpPr/>
           <p:nvPr/>
         </p:nvSpPr>
@@ -2527,7 +2551,7 @@
       </p:sp>
       <p:sp>
         <p:nvSpPr>
-          <p:cNvPr id="46" name="Text 44"/>
+          <p:cNvPr id="47" name="Text 44"/>
           <p:cNvSpPr/>
           <p:nvPr/>
         </p:nvSpPr>
@@ -2566,7 +2590,7 @@
       </p:sp>
       <p:sp>
         <p:nvSpPr>
-          <p:cNvPr id="47" name="Shape 45"/>
+          <p:cNvPr id="48" name="Shape 45"/>
           <p:cNvSpPr/>
           <p:nvPr/>
         </p:nvSpPr>
@@ -2588,7 +2612,7 @@
       </p:sp>
       <p:sp>
         <p:nvSpPr>
-          <p:cNvPr id="48" name="Text 46"/>
+          <p:cNvPr id="49" name="Text 46"/>
           <p:cNvSpPr/>
           <p:nvPr/>
         </p:nvSpPr>
@@ -2664,7 +2688,7 @@
       </p:sp>
       <p:sp>
         <p:nvSpPr>
-          <p:cNvPr id="49" name="Shape 47"/>
+          <p:cNvPr id="50" name="Shape 47"/>
           <p:cNvSpPr/>
           <p:nvPr/>
         </p:nvSpPr>
@@ -2691,7 +2715,7 @@
       </p:sp>
       <p:sp>
         <p:nvSpPr>
-          <p:cNvPr id="50" name="Text 48"/>
+          <p:cNvPr id="51" name="Text 48"/>
           <p:cNvSpPr/>
           <p:nvPr/>
         </p:nvSpPr>
@@ -2744,7 +2768,7 @@
       </p:sp>
       <p:sp>
         <p:nvSpPr>
-          <p:cNvPr id="51" name="Text 49"/>
+          <p:cNvPr id="52" name="Text 49"/>
           <p:cNvSpPr/>
           <p:nvPr/>
         </p:nvSpPr>
@@ -2783,7 +2807,7 @@
       </p:sp>
       <p:sp>
         <p:nvSpPr>
-          <p:cNvPr id="52" name="Text 50"/>
+          <p:cNvPr id="53" name="Text 50"/>
           <p:cNvSpPr/>
           <p:nvPr/>
         </p:nvSpPr>
@@ -2842,7 +2866,7 @@
       </p:sp>
       <p:sp>
         <p:nvSpPr>
-          <p:cNvPr id="53" name="Text 51"/>
+          <p:cNvPr id="54" name="Text 51"/>
           <p:cNvSpPr/>
           <p:nvPr/>
         </p:nvSpPr>
@@ -2881,7 +2905,7 @@
       </p:sp>
       <p:sp>
         <p:nvSpPr>
-          <p:cNvPr id="54" name="Text 52"/>
+          <p:cNvPr id="55" name="Text 52"/>
           <p:cNvSpPr/>
           <p:nvPr/>
         </p:nvSpPr>
@@ -2940,7 +2964,7 @@
       </p:sp>
       <p:sp>
         <p:nvSpPr>
-          <p:cNvPr id="55" name="Text 53"/>
+          <p:cNvPr id="56" name="Text 53"/>
           <p:cNvSpPr/>
           <p:nvPr/>
         </p:nvSpPr>
@@ -2979,7 +3003,7 @@
       </p:sp>
       <p:sp>
         <p:nvSpPr>
-          <p:cNvPr id="56" name="Text 54"/>
+          <p:cNvPr id="57" name="Text 54"/>
           <p:cNvSpPr/>
           <p:nvPr/>
         </p:nvSpPr>
@@ -3038,7 +3062,7 @@
       </p:sp>
       <p:sp>
         <p:nvSpPr>
-          <p:cNvPr id="57" name="Text 55"/>
+          <p:cNvPr id="58" name="Text 55"/>
           <p:cNvSpPr/>
           <p:nvPr/>
         </p:nvSpPr>
@@ -3077,7 +3101,7 @@
       </p:sp>
       <p:sp>
         <p:nvSpPr>
-          <p:cNvPr id="58" name="Text 56"/>
+          <p:cNvPr id="59" name="Text 56"/>
           <p:cNvSpPr/>
           <p:nvPr/>
         </p:nvSpPr>
@@ -3116,7 +3140,7 @@
       </p:sp>
       <p:sp>
         <p:nvSpPr>
-          <p:cNvPr id="59" name="Shape 57"/>
+          <p:cNvPr id="60" name="Shape 57"/>
           <p:cNvSpPr/>
           <p:nvPr/>
         </p:nvSpPr>
@@ -3138,7 +3162,7 @@
       </p:sp>
       <p:sp>
         <p:nvSpPr>
-          <p:cNvPr id="60" name="Text 58"/>
+          <p:cNvPr id="61" name="Text 58"/>
           <p:cNvSpPr/>
           <p:nvPr/>
         </p:nvSpPr>
@@ -3177,7 +3201,7 @@
       </p:sp>
       <p:sp>
         <p:nvSpPr>
-          <p:cNvPr id="61" name="Text 59"/>
+          <p:cNvPr id="62" name="Text 59"/>
           <p:cNvSpPr/>
           <p:nvPr/>
         </p:nvSpPr>
@@ -3216,7 +3240,7 @@
       </p:sp>
       <p:sp>
         <p:nvSpPr>
-          <p:cNvPr id="62" name="Shape 60"/>
+          <p:cNvPr id="63" name="Shape 60"/>
           <p:cNvSpPr/>
           <p:nvPr/>
         </p:nvSpPr>
@@ -3238,7 +3262,7 @@
       </p:sp>
       <p:sp>
         <p:nvSpPr>
-          <p:cNvPr id="63" name="Text 61"/>
+          <p:cNvPr id="64" name="Text 61"/>
           <p:cNvSpPr/>
           <p:nvPr/>
         </p:nvSpPr>
@@ -3277,7 +3301,7 @@
       </p:sp>
       <p:sp>
         <p:nvSpPr>
-          <p:cNvPr id="64" name="Text 62"/>
+          <p:cNvPr id="65" name="Text 62"/>
           <p:cNvSpPr/>
           <p:nvPr/>
         </p:nvSpPr>
@@ -3316,7 +3340,7 @@
       </p:sp>
       <p:sp>
         <p:nvSpPr>
-          <p:cNvPr id="65" name="Shape 63"/>
+          <p:cNvPr id="66" name="Shape 63"/>
           <p:cNvSpPr/>
           <p:nvPr/>
         </p:nvSpPr>
@@ -3338,7 +3362,7 @@
       </p:sp>
       <p:sp>
         <p:nvSpPr>
-          <p:cNvPr id="66" name="Text 64"/>
+          <p:cNvPr id="67" name="Text 64"/>
           <p:cNvSpPr/>
           <p:nvPr/>
         </p:nvSpPr>
@@ -3377,7 +3401,7 @@
       </p:sp>
       <p:sp>
         <p:nvSpPr>
-          <p:cNvPr id="67" name="Shape 65"/>
+          <p:cNvPr id="68" name="Shape 65"/>
           <p:cNvSpPr/>
           <p:nvPr/>
         </p:nvSpPr>
@@ -3399,7 +3423,7 @@
       </p:sp>
       <p:sp>
         <p:nvSpPr>
-          <p:cNvPr id="68" name="Text 66"/>
+          <p:cNvPr id="69" name="Text 66"/>
           <p:cNvSpPr/>
           <p:nvPr/>
         </p:nvSpPr>
@@ -3459,7 +3483,7 @@
       </p:sp>
       <p:sp>
         <p:nvSpPr>
-          <p:cNvPr id="69" name="Shape 67"/>
+          <p:cNvPr id="70" name="Shape 67"/>
           <p:cNvSpPr/>
           <p:nvPr/>
         </p:nvSpPr>
@@ -3481,7 +3505,7 @@
       </p:sp>
       <p:sp>
         <p:nvSpPr>
-          <p:cNvPr id="70" name="Text 68"/>
+          <p:cNvPr id="71" name="Text 68"/>
           <p:cNvSpPr/>
           <p:nvPr/>
         </p:nvSpPr>
@@ -3559,7 +3583,7 @@
       </p:sp>
       <p:sp>
         <p:nvSpPr>
-          <p:cNvPr id="71" name="Shape 69"/>
+          <p:cNvPr id="72" name="Shape 69"/>
           <p:cNvSpPr/>
           <p:nvPr/>
         </p:nvSpPr>
@@ -3581,7 +3605,7 @@
       </p:sp>
       <p:sp>
         <p:nvSpPr>
-          <p:cNvPr id="72" name="Text 70"/>
+          <p:cNvPr id="73" name="Text 70"/>
           <p:cNvSpPr/>
           <p:nvPr/>
         </p:nvSpPr>
@@ -3659,7 +3683,7 @@
       </p:sp>
       <p:sp>
         <p:nvSpPr>
-          <p:cNvPr id="73" name="Shape 71"/>
+          <p:cNvPr id="74" name="Shape 71"/>
           <p:cNvSpPr/>
           <p:nvPr/>
         </p:nvSpPr>
@@ -3681,7 +3705,7 @@
       </p:sp>
       <p:sp>
         <p:nvSpPr>
-          <p:cNvPr id="74" name="Text 72"/>
+          <p:cNvPr id="75" name="Text 72"/>
           <p:cNvSpPr/>
           <p:nvPr/>
         </p:nvSpPr>
@@ -3759,7 +3783,7 @@
       </p:sp>
       <p:sp>
         <p:nvSpPr>
-          <p:cNvPr id="75" name="Text 73"/>
+          <p:cNvPr id="76" name="Text 73"/>
           <p:cNvSpPr/>
           <p:nvPr/>
         </p:nvSpPr>
@@ -3798,7 +3822,7 @@
       </p:sp>
       <p:sp>
         <p:nvSpPr>
-          <p:cNvPr id="76" name="Text 74"/>
+          <p:cNvPr id="77" name="Text 74"/>
           <p:cNvSpPr/>
           <p:nvPr/>
         </p:nvSpPr>
@@ -3837,7 +3861,7 @@
       </p:sp>
       <p:sp>
         <p:nvSpPr>
-          <p:cNvPr id="77" name="Text 75"/>
+          <p:cNvPr id="78" name="Text 75"/>
           <p:cNvSpPr/>
           <p:nvPr/>
         </p:nvSpPr>
@@ -3879,7 +3903,7 @@
       </p:sp>
       <p:sp>
         <p:nvSpPr>
-          <p:cNvPr id="78" name="Text 76"/>
+          <p:cNvPr id="79" name="Text 76"/>
           <p:cNvSpPr/>
           <p:nvPr/>
         </p:nvSpPr>
@@ -3918,7 +3942,7 @@
       </p:sp>
       <p:sp>
         <p:nvSpPr>
-          <p:cNvPr id="79" name="Text 77"/>
+          <p:cNvPr id="80" name="Text 77"/>
           <p:cNvSpPr/>
           <p:nvPr/>
         </p:nvSpPr>

--- a/Dynamic_Industry_One_Page_Dashboard_EN.pptx
+++ b/Dynamic_Industry_One_Page_Dashboard_EN.pptx
@@ -1083,7 +1083,7 @@
                 <a:ea typeface="Calibri" pitchFamily="34" charset="-122"/>
                 <a:cs typeface="Calibri" pitchFamily="34" charset="-120"/>
               </a:rPr>
-              <a:t>Myung-geun Jung · jmk4893@dynamicindustry.kr · Aug 2026</a:t>
+              <a:t>Jason Jeong · jmk4893@dynamicindustry.kr · Aug 2026</a:t>
             </a:r>
             <a:endParaRPr lang="en-US" sz="900" dirty="0"/>
           </a:p>
